--- a/Magician_Lord_hacks/Double_bank_hack.pptx
+++ b/Magician_Lord_hacks/Double_bank_hack.pptx
@@ -3279,6 +3279,44 @@
           </a:p>
         </p:txBody>
       </p:sp>
+      <p:sp>
+        <p:nvSpPr>
+          <p:cNvPr id="11" name="ZoneTexte 10"/>
+          <p:cNvSpPr txBox="1"/>
+          <p:nvPr/>
+        </p:nvSpPr>
+        <p:spPr>
+          <a:xfrm>
+            <a:off x="2555776" y="2780928"/>
+            <a:ext cx="1080120" cy="461665"/>
+          </a:xfrm>
+          <a:prstGeom prst="rect">
+            <a:avLst/>
+          </a:prstGeom>
+          <a:noFill/>
+        </p:spPr>
+        <p:txBody>
+          <a:bodyPr wrap="square" rtlCol="0">
+            <a:spAutoFit/>
+          </a:bodyPr>
+          <a:lstStyle/>
+          <a:p>
+            <a:r>
+              <a:rPr lang="fr-FR" sz="2400" b="1" dirty="0" smtClean="0">
+                <a:solidFill>
+                  <a:srgbClr val="FFFF00"/>
+                </a:solidFill>
+              </a:rPr>
+              <a:t>GND</a:t>
+            </a:r>
+            <a:endParaRPr lang="fr-FR" sz="2400" b="1" dirty="0">
+              <a:solidFill>
+                <a:srgbClr val="FFFF00"/>
+              </a:solidFill>
+            </a:endParaRPr>
+          </a:p>
+        </p:txBody>
+      </p:sp>
     </p:spTree>
   </p:cSld>
   <p:clrMapOvr>
